--- a/assets/pptx/catalog-537.pptx
+++ b/assets/pptx/catalog-537.pptx
@@ -3248,7 +3248,7 @@
                 <a:ea typeface="Ebrima"/>
                 <a:cs typeface="Ebrima"/>
               </a:rPr>
-              <a:t>ቅዱስ (7x)</a:t>
+              <a:t>ቅዱስ 7x</a:t>
             </a:r>
           </a:p>
           <a:p>
@@ -3266,7 +3266,7 @@
                 <a:ea typeface="Ebrima"/>
                 <a:cs typeface="Ebrima"/>
               </a:rPr>
-              <a:t>ሃያል (7x)</a:t>
+              <a:t>ሃያል 7x</a:t>
             </a:r>
           </a:p>
         </p:txBody>
@@ -3333,7 +3333,7 @@
                 <a:ea typeface="Ebrima"/>
                 <a:cs typeface="Ebrima"/>
               </a:rPr>
-              <a:t>ክብር ላንተ (3x)</a:t>
+              <a:t>ክብር ላንተ 3x</a:t>
             </a:r>
           </a:p>
           <a:p>
@@ -3539,7 +3539,7 @@
                 <a:ea typeface="Ebrima"/>
                 <a:cs typeface="Ebrima"/>
               </a:rPr>
-              <a:t>ቅዱስ (7x)</a:t>
+              <a:t>ቅዱስ 7x</a:t>
             </a:r>
           </a:p>
           <a:p>
@@ -3557,7 +3557,7 @@
                 <a:ea typeface="Ebrima"/>
                 <a:cs typeface="Ebrima"/>
               </a:rPr>
-              <a:t>ሃያል (7x)</a:t>
+              <a:t>ሃያል 7x</a:t>
             </a:r>
           </a:p>
         </p:txBody>
@@ -3624,7 +3624,7 @@
                 <a:ea typeface="Ebrima"/>
                 <a:cs typeface="Ebrima"/>
               </a:rPr>
-              <a:t>ክብር ላንተ (3x)</a:t>
+              <a:t>ክብር ላንተ 3x</a:t>
             </a:r>
           </a:p>
           <a:p>
@@ -3830,7 +3830,7 @@
                 <a:ea typeface="Ebrima"/>
                 <a:cs typeface="Ebrima"/>
               </a:rPr>
-              <a:t>ቅዱስ (7x)</a:t>
+              <a:t>ቅዱስ 7x</a:t>
             </a:r>
           </a:p>
           <a:p>
@@ -3848,7 +3848,7 @@
                 <a:ea typeface="Ebrima"/>
                 <a:cs typeface="Ebrima"/>
               </a:rPr>
-              <a:t>ሃያል (7x)</a:t>
+              <a:t>ሃያል 7x</a:t>
             </a:r>
           </a:p>
         </p:txBody>
@@ -3915,7 +3915,7 @@
                 <a:ea typeface="Ebrima"/>
                 <a:cs typeface="Ebrima"/>
               </a:rPr>
-              <a:t>ክብር ላንተ (3x)</a:t>
+              <a:t>ክብር ላንተ 3x</a:t>
             </a:r>
           </a:p>
           <a:p>
